--- a/doc/개발환경_설치매뉴얼(Node.JS).pptx
+++ b/doc/개발환경_설치매뉴얼(Node.JS).pptx
@@ -16,15 +16,8 @@
     <p:sldId id="264" r:id="rId10"/>
     <p:sldId id="265" r:id="rId11"/>
     <p:sldId id="275" r:id="rId12"/>
-    <p:sldId id="266" r:id="rId13"/>
-    <p:sldId id="267" r:id="rId14"/>
-    <p:sldId id="268" r:id="rId15"/>
-    <p:sldId id="269" r:id="rId16"/>
-    <p:sldId id="270" r:id="rId17"/>
-    <p:sldId id="271" r:id="rId18"/>
-    <p:sldId id="272" r:id="rId19"/>
-    <p:sldId id="273" r:id="rId20"/>
-    <p:sldId id="274" r:id="rId21"/>
+    <p:sldId id="276" r:id="rId13"/>
+    <p:sldId id="277" r:id="rId14"/>
   </p:sldIdLst>
   <p:sldSz cx="12192000" cy="6858000"/>
   <p:notesSz cx="6858000" cy="9144000"/>
@@ -123,6 +116,11 @@
       </a:defRPr>
     </a:lvl9pPr>
   </p:defaultTextStyle>
+  <p:extLst>
+    <p:ext uri="{EFAFB233-063F-42B5-8137-9DF3F51BA10A}">
+      <p15:sldGuideLst xmlns:p15="http://schemas.microsoft.com/office/powerpoint/2012/main"/>
+    </p:ext>
+  </p:extLst>
 </p:presentation>
 </file>
 
@@ -273,7 +271,7 @@
           <a:p>
             <a:fld id="{7359EE32-49FD-4EA7-9011-353EB936649F}" type="datetimeFigureOut">
               <a:rPr lang="ko-KR" altLang="en-US" smtClean="0"/>
-              <a:t>2025-09-02</a:t>
+              <a:t>2025-09-03</a:t>
             </a:fld>
             <a:endParaRPr lang="ko-KR" altLang="en-US"/>
           </a:p>
@@ -471,7 +469,7 @@
           <a:p>
             <a:fld id="{7359EE32-49FD-4EA7-9011-353EB936649F}" type="datetimeFigureOut">
               <a:rPr lang="ko-KR" altLang="en-US" smtClean="0"/>
-              <a:t>2025-09-02</a:t>
+              <a:t>2025-09-03</a:t>
             </a:fld>
             <a:endParaRPr lang="ko-KR" altLang="en-US"/>
           </a:p>
@@ -679,7 +677,7 @@
           <a:p>
             <a:fld id="{7359EE32-49FD-4EA7-9011-353EB936649F}" type="datetimeFigureOut">
               <a:rPr lang="ko-KR" altLang="en-US" smtClean="0"/>
-              <a:t>2025-09-02</a:t>
+              <a:t>2025-09-03</a:t>
             </a:fld>
             <a:endParaRPr lang="ko-KR" altLang="en-US"/>
           </a:p>
@@ -877,7 +875,7 @@
           <a:p>
             <a:fld id="{7359EE32-49FD-4EA7-9011-353EB936649F}" type="datetimeFigureOut">
               <a:rPr lang="ko-KR" altLang="en-US" smtClean="0"/>
-              <a:t>2025-09-02</a:t>
+              <a:t>2025-09-03</a:t>
             </a:fld>
             <a:endParaRPr lang="ko-KR" altLang="en-US"/>
           </a:p>
@@ -1152,7 +1150,7 @@
           <a:p>
             <a:fld id="{7359EE32-49FD-4EA7-9011-353EB936649F}" type="datetimeFigureOut">
               <a:rPr lang="ko-KR" altLang="en-US" smtClean="0"/>
-              <a:t>2025-09-02</a:t>
+              <a:t>2025-09-03</a:t>
             </a:fld>
             <a:endParaRPr lang="ko-KR" altLang="en-US"/>
           </a:p>
@@ -1417,7 +1415,7 @@
           <a:p>
             <a:fld id="{7359EE32-49FD-4EA7-9011-353EB936649F}" type="datetimeFigureOut">
               <a:rPr lang="ko-KR" altLang="en-US" smtClean="0"/>
-              <a:t>2025-09-02</a:t>
+              <a:t>2025-09-03</a:t>
             </a:fld>
             <a:endParaRPr lang="ko-KR" altLang="en-US"/>
           </a:p>
@@ -1829,7 +1827,7 @@
           <a:p>
             <a:fld id="{7359EE32-49FD-4EA7-9011-353EB936649F}" type="datetimeFigureOut">
               <a:rPr lang="ko-KR" altLang="en-US" smtClean="0"/>
-              <a:t>2025-09-02</a:t>
+              <a:t>2025-09-03</a:t>
             </a:fld>
             <a:endParaRPr lang="ko-KR" altLang="en-US"/>
           </a:p>
@@ -1970,7 +1968,7 @@
           <a:p>
             <a:fld id="{7359EE32-49FD-4EA7-9011-353EB936649F}" type="datetimeFigureOut">
               <a:rPr lang="ko-KR" altLang="en-US" smtClean="0"/>
-              <a:t>2025-09-02</a:t>
+              <a:t>2025-09-03</a:t>
             </a:fld>
             <a:endParaRPr lang="ko-KR" altLang="en-US"/>
           </a:p>
@@ -2083,7 +2081,7 @@
           <a:p>
             <a:fld id="{7359EE32-49FD-4EA7-9011-353EB936649F}" type="datetimeFigureOut">
               <a:rPr lang="ko-KR" altLang="en-US" smtClean="0"/>
-              <a:t>2025-09-02</a:t>
+              <a:t>2025-09-03</a:t>
             </a:fld>
             <a:endParaRPr lang="ko-KR" altLang="en-US"/>
           </a:p>
@@ -2394,7 +2392,7 @@
           <a:p>
             <a:fld id="{7359EE32-49FD-4EA7-9011-353EB936649F}" type="datetimeFigureOut">
               <a:rPr lang="ko-KR" altLang="en-US" smtClean="0"/>
-              <a:t>2025-09-02</a:t>
+              <a:t>2025-09-03</a:t>
             </a:fld>
             <a:endParaRPr lang="ko-KR" altLang="en-US"/>
           </a:p>
@@ -2682,7 +2680,7 @@
           <a:p>
             <a:fld id="{7359EE32-49FD-4EA7-9011-353EB936649F}" type="datetimeFigureOut">
               <a:rPr lang="ko-KR" altLang="en-US" smtClean="0"/>
-              <a:t>2025-09-02</a:t>
+              <a:t>2025-09-03</a:t>
             </a:fld>
             <a:endParaRPr lang="ko-KR" altLang="en-US"/>
           </a:p>
@@ -2923,7 +2921,7 @@
           <a:p>
             <a:fld id="{7359EE32-49FD-4EA7-9011-353EB936649F}" type="datetimeFigureOut">
               <a:rPr lang="ko-KR" altLang="en-US" smtClean="0"/>
-              <a:t>2025-09-02</a:t>
+              <a:t>2025-09-03</a:t>
             </a:fld>
             <a:endParaRPr lang="ko-KR" altLang="en-US"/>
           </a:p>
@@ -3362,49 +3360,38 @@
           <a:lstStyle/>
           <a:p>
             <a:r>
+              <a:rPr lang="ko-KR" altLang="en-US" dirty="0"/>
+              <a:t>개발환경 설치 매뉴얼</a:t>
+            </a:r>
+          </a:p>
+        </p:txBody>
+      </p:sp>
+      <p:sp>
+        <p:nvSpPr>
+          <p:cNvPr id="3" name="부제목 2">
+            <a:extLst>
+              <a:ext uri="{FF2B5EF4-FFF2-40B4-BE49-F238E27FC236}">
+                <a16:creationId xmlns:a16="http://schemas.microsoft.com/office/drawing/2014/main" id="{55572435-4746-0080-CEFA-668391B2F3A3}"/>
+              </a:ext>
+            </a:extLst>
+          </p:cNvPr>
+          <p:cNvSpPr>
+            <a:spLocks noGrp="1"/>
+          </p:cNvSpPr>
+          <p:nvPr>
+            <p:ph type="subTitle" idx="1"/>
+          </p:nvPr>
+        </p:nvSpPr>
+        <p:spPr/>
+        <p:txBody>
+          <a:bodyPr/>
+          <a:lstStyle/>
+          <a:p>
+            <a:r>
               <a:rPr lang="en-US" altLang="ko-KR" dirty="0"/>
-              <a:t>Node.JS + Vue.js</a:t>
-            </a:r>
-            <a:br>
-              <a:rPr lang="en-US" altLang="ko-KR" dirty="0"/>
-            </a:br>
-            <a:r>
-              <a:rPr lang="en-US" altLang="ko-KR" dirty="0"/>
-              <a:t>+ </a:t>
-            </a:r>
-            <a:r>
-              <a:rPr lang="ko-KR" altLang="en-US" dirty="0" err="1"/>
-              <a:t>개발툴</a:t>
-            </a:r>
-            <a:r>
-              <a:rPr lang="ko-KR" altLang="en-US" dirty="0"/>
-              <a:t> 설치</a:t>
-            </a:r>
-          </a:p>
-        </p:txBody>
-      </p:sp>
-      <p:sp>
-        <p:nvSpPr>
-          <p:cNvPr id="3" name="부제목 2">
-            <a:extLst>
-              <a:ext uri="{FF2B5EF4-FFF2-40B4-BE49-F238E27FC236}">
-                <a16:creationId xmlns:a16="http://schemas.microsoft.com/office/drawing/2014/main" id="{55572435-4746-0080-CEFA-668391B2F3A3}"/>
-              </a:ext>
-            </a:extLst>
-          </p:cNvPr>
-          <p:cNvSpPr>
-            <a:spLocks noGrp="1"/>
-          </p:cNvSpPr>
-          <p:nvPr>
-            <p:ph type="subTitle" idx="1"/>
-          </p:nvPr>
-        </p:nvSpPr>
-        <p:spPr/>
-        <p:txBody>
-          <a:bodyPr/>
-          <a:lstStyle/>
-          <a:p>
-            <a:endParaRPr lang="ko-KR" altLang="en-US"/>
+              <a:t>Node.JS</a:t>
+            </a:r>
+            <a:endParaRPr lang="ko-KR" altLang="en-US" dirty="0"/>
           </a:p>
         </p:txBody>
       </p:sp>
@@ -3550,7 +3537,11 @@
           <a:bodyPr/>
           <a:lstStyle/>
           <a:p>
-            <a:endParaRPr lang="ko-KR" altLang="en-US"/>
+            <a:r>
+              <a:rPr lang="en-US" altLang="ko-KR" dirty="0"/>
+              <a:t>CMD</a:t>
+            </a:r>
+            <a:endParaRPr lang="ko-KR" altLang="en-US" dirty="0"/>
           </a:p>
         </p:txBody>
       </p:sp>
@@ -3606,10 +3597,38 @@
           </a:p>
           <a:p>
             <a:r>
+              <a:rPr lang="ko-KR" altLang="en-US" dirty="0"/>
+              <a:t>실행권한 부여</a:t>
+            </a:r>
+            <a:endParaRPr lang="en-US" altLang="ko-KR" dirty="0"/>
+          </a:p>
+          <a:p>
+            <a:pPr marL="0" indent="0">
+              <a:buNone/>
+            </a:pPr>
+            <a:r>
               <a:rPr lang="en-US" altLang="ko-KR" dirty="0"/>
-              <a:t>C:\Users\Admin&gt;</a:t>
-            </a:r>
-            <a:endParaRPr lang="ko-KR" altLang="en-US" dirty="0"/>
+              <a:t>$ Set-</a:t>
+            </a:r>
+            <a:r>
+              <a:rPr lang="en-US" altLang="ko-KR" dirty="0" err="1"/>
+              <a:t>ExecutionPolicy</a:t>
+            </a:r>
+            <a:r>
+              <a:rPr lang="en-US" altLang="ko-KR" dirty="0"/>
+              <a:t> </a:t>
+            </a:r>
+            <a:r>
+              <a:rPr lang="en-US" altLang="ko-KR" dirty="0" err="1"/>
+              <a:t>RemoteSigned</a:t>
+            </a:r>
+            <a:r>
+              <a:rPr lang="en-US" altLang="ko-KR" dirty="0"/>
+              <a:t> -Scope Process</a:t>
+            </a:r>
+          </a:p>
+          <a:p>
+            <a:endParaRPr lang="en-US" altLang="ko-KR" dirty="0"/>
           </a:p>
         </p:txBody>
       </p:sp>
@@ -3648,7 +3667,7 @@
           <p:cNvPr id="2" name="제목 1">
             <a:extLst>
               <a:ext uri="{FF2B5EF4-FFF2-40B4-BE49-F238E27FC236}">
-                <a16:creationId xmlns:a16="http://schemas.microsoft.com/office/drawing/2014/main" id="{215E57A1-95CA-F9E5-008E-1D99E51F2AC0}"/>
+                <a16:creationId xmlns:a16="http://schemas.microsoft.com/office/drawing/2014/main" id="{C4C31A83-235A-D249-0815-11BFDE45EF1C}"/>
               </a:ext>
             </a:extLst>
           </p:cNvPr>
@@ -3666,48 +3685,276 @@
           <a:p>
             <a:r>
               <a:rPr lang="en-US" altLang="ko-KR" dirty="0" err="1"/>
-              <a:t>VSCode</a:t>
+              <a:t>NestJS</a:t>
             </a:r>
             <a:endParaRPr lang="ko-KR" altLang="en-US" dirty="0"/>
           </a:p>
         </p:txBody>
       </p:sp>
-      <p:pic>
-        <p:nvPicPr>
-          <p:cNvPr id="5" name="내용 개체 틀 4">
-            <a:extLst>
-              <a:ext uri="{FF2B5EF4-FFF2-40B4-BE49-F238E27FC236}">
-                <a16:creationId xmlns:a16="http://schemas.microsoft.com/office/drawing/2014/main" id="{1C4BDE8B-D722-B44F-38C2-A2E64B18D102}"/>
-              </a:ext>
-            </a:extLst>
-          </p:cNvPr>
-          <p:cNvPicPr>
-            <a:picLocks noGrp="1" noChangeAspect="1"/>
-          </p:cNvPicPr>
+      <p:sp>
+        <p:nvSpPr>
+          <p:cNvPr id="3" name="내용 개체 틀 2">
+            <a:extLst>
+              <a:ext uri="{FF2B5EF4-FFF2-40B4-BE49-F238E27FC236}">
+                <a16:creationId xmlns:a16="http://schemas.microsoft.com/office/drawing/2014/main" id="{373CC9B8-F768-BBB9-2725-03ED4DE43A71}"/>
+              </a:ext>
+            </a:extLst>
+          </p:cNvPr>
+          <p:cNvSpPr>
+            <a:spLocks noGrp="1"/>
+          </p:cNvSpPr>
           <p:nvPr>
             <p:ph idx="1"/>
           </p:nvPr>
-        </p:nvPicPr>
-        <p:blipFill>
-          <a:blip r:embed="rId2"/>
-          <a:stretch>
-            <a:fillRect/>
-          </a:stretch>
-        </p:blipFill>
-        <p:spPr>
-          <a:xfrm>
-            <a:off x="3089176" y="1825625"/>
-            <a:ext cx="6013647" cy="4351338"/>
-          </a:xfrm>
-          <a:prstGeom prst="rect">
-            <a:avLst/>
-          </a:prstGeom>
-        </p:spPr>
-      </p:pic>
+        </p:nvSpPr>
+        <p:spPr/>
+        <p:txBody>
+          <a:bodyPr>
+            <a:normAutofit fontScale="32500" lnSpcReduction="20000"/>
+          </a:bodyPr>
+          <a:lstStyle/>
+          <a:p>
+            <a:pPr marL="0" indent="0">
+              <a:buNone/>
+            </a:pPr>
+            <a:r>
+              <a:rPr lang="en-US" altLang="ko-KR" dirty="0"/>
+              <a:t>$ </a:t>
+            </a:r>
+            <a:r>
+              <a:rPr lang="en-US" altLang="ko-KR" dirty="0" err="1"/>
+              <a:t>npm</a:t>
+            </a:r>
+            <a:r>
+              <a:rPr lang="en-US" altLang="ko-KR" dirty="0"/>
+              <a:t> I –g @nestjs/cli</a:t>
+            </a:r>
+          </a:p>
+          <a:p>
+            <a:pPr marL="0" indent="0">
+              <a:buNone/>
+            </a:pPr>
+            <a:r>
+              <a:rPr lang="en-US" altLang="ko-KR" dirty="0"/>
+              <a:t>$ nest new {project-name}</a:t>
+            </a:r>
+          </a:p>
+          <a:p>
+            <a:pPr marL="0" indent="0">
+              <a:buNone/>
+            </a:pPr>
+            <a:endParaRPr lang="en-US" altLang="ko-KR" dirty="0"/>
+          </a:p>
+          <a:p>
+            <a:pPr marL="0" indent="0">
+              <a:buNone/>
+            </a:pPr>
+            <a:r>
+              <a:rPr lang="en-US" altLang="ko-KR" dirty="0"/>
+              <a:t>├── README.md</a:t>
+            </a:r>
+          </a:p>
+          <a:p>
+            <a:pPr marL="0" indent="0">
+              <a:buNone/>
+            </a:pPr>
+            <a:r>
+              <a:rPr lang="en-US" altLang="ko-KR" dirty="0"/>
+              <a:t>├── nest-</a:t>
+            </a:r>
+            <a:r>
+              <a:rPr lang="en-US" altLang="ko-KR" dirty="0" err="1"/>
+              <a:t>cli.json</a:t>
+            </a:r>
+            <a:endParaRPr lang="en-US" altLang="ko-KR" dirty="0"/>
+          </a:p>
+          <a:p>
+            <a:pPr marL="0" indent="0">
+              <a:buNone/>
+            </a:pPr>
+            <a:r>
+              <a:rPr lang="en-US" altLang="ko-KR" dirty="0"/>
+              <a:t>├── </a:t>
+            </a:r>
+            <a:r>
+              <a:rPr lang="en-US" altLang="ko-KR" dirty="0" err="1"/>
+              <a:t>node_modules</a:t>
+            </a:r>
+            <a:endParaRPr lang="en-US" altLang="ko-KR" dirty="0"/>
+          </a:p>
+          <a:p>
+            <a:pPr marL="0" indent="0">
+              <a:buNone/>
+            </a:pPr>
+            <a:r>
+              <a:rPr lang="en-US" altLang="ko-KR" dirty="0"/>
+              <a:t>├── package-</a:t>
+            </a:r>
+            <a:r>
+              <a:rPr lang="en-US" altLang="ko-KR" dirty="0" err="1"/>
+              <a:t>lock.json</a:t>
+            </a:r>
+            <a:endParaRPr lang="en-US" altLang="ko-KR" dirty="0"/>
+          </a:p>
+          <a:p>
+            <a:pPr marL="0" indent="0">
+              <a:buNone/>
+            </a:pPr>
+            <a:r>
+              <a:rPr lang="en-US" altLang="ko-KR" dirty="0"/>
+              <a:t>├── </a:t>
+            </a:r>
+            <a:r>
+              <a:rPr lang="en-US" altLang="ko-KR" dirty="0" err="1"/>
+              <a:t>package.json</a:t>
+            </a:r>
+            <a:endParaRPr lang="en-US" altLang="ko-KR" dirty="0"/>
+          </a:p>
+          <a:p>
+            <a:pPr marL="0" indent="0">
+              <a:buNone/>
+            </a:pPr>
+            <a:r>
+              <a:rPr lang="en-US" altLang="ko-KR" dirty="0"/>
+              <a:t>├── </a:t>
+            </a:r>
+            <a:r>
+              <a:rPr lang="en-US" altLang="ko-KR" dirty="0" err="1"/>
+              <a:t>src</a:t>
+            </a:r>
+            <a:endParaRPr lang="en-US" altLang="ko-KR" dirty="0"/>
+          </a:p>
+          <a:p>
+            <a:pPr marL="0" indent="0">
+              <a:buNone/>
+            </a:pPr>
+            <a:r>
+              <a:rPr lang="en-US" altLang="ko-KR" dirty="0"/>
+              <a:t>│   ├── </a:t>
+            </a:r>
+            <a:r>
+              <a:rPr lang="en-US" altLang="ko-KR" dirty="0" err="1"/>
+              <a:t>app.controller.spec.ts</a:t>
+            </a:r>
+            <a:endParaRPr lang="en-US" altLang="ko-KR" dirty="0"/>
+          </a:p>
+          <a:p>
+            <a:pPr marL="0" indent="0">
+              <a:buNone/>
+            </a:pPr>
+            <a:r>
+              <a:rPr lang="en-US" altLang="ko-KR" dirty="0"/>
+              <a:t>│   ├── </a:t>
+            </a:r>
+            <a:r>
+              <a:rPr lang="en-US" altLang="ko-KR" dirty="0" err="1"/>
+              <a:t>app.controller.ts</a:t>
+            </a:r>
+            <a:endParaRPr lang="en-US" altLang="ko-KR" dirty="0"/>
+          </a:p>
+          <a:p>
+            <a:pPr marL="0" indent="0">
+              <a:buNone/>
+            </a:pPr>
+            <a:r>
+              <a:rPr lang="en-US" altLang="ko-KR" dirty="0"/>
+              <a:t>│   ├── </a:t>
+            </a:r>
+            <a:r>
+              <a:rPr lang="en-US" altLang="ko-KR" dirty="0" err="1"/>
+              <a:t>app.module.ts</a:t>
+            </a:r>
+            <a:endParaRPr lang="en-US" altLang="ko-KR" dirty="0"/>
+          </a:p>
+          <a:p>
+            <a:pPr marL="0" indent="0">
+              <a:buNone/>
+            </a:pPr>
+            <a:r>
+              <a:rPr lang="en-US" altLang="ko-KR" dirty="0"/>
+              <a:t>│   ├── </a:t>
+            </a:r>
+            <a:r>
+              <a:rPr lang="en-US" altLang="ko-KR" dirty="0" err="1"/>
+              <a:t>app.service.ts</a:t>
+            </a:r>
+            <a:endParaRPr lang="en-US" altLang="ko-KR" dirty="0"/>
+          </a:p>
+          <a:p>
+            <a:pPr marL="0" indent="0">
+              <a:buNone/>
+            </a:pPr>
+            <a:r>
+              <a:rPr lang="en-US" altLang="ko-KR" dirty="0"/>
+              <a:t>│   └── </a:t>
+            </a:r>
+            <a:r>
+              <a:rPr lang="en-US" altLang="ko-KR" dirty="0" err="1"/>
+              <a:t>main.ts</a:t>
+            </a:r>
+            <a:endParaRPr lang="en-US" altLang="ko-KR" dirty="0"/>
+          </a:p>
+          <a:p>
+            <a:pPr marL="0" indent="0">
+              <a:buNone/>
+            </a:pPr>
+            <a:r>
+              <a:rPr lang="en-US" altLang="ko-KR" dirty="0"/>
+              <a:t>├── test</a:t>
+            </a:r>
+          </a:p>
+          <a:p>
+            <a:pPr marL="0" indent="0">
+              <a:buNone/>
+            </a:pPr>
+            <a:r>
+              <a:rPr lang="en-US" altLang="ko-KR" dirty="0"/>
+              <a:t>│   ├── app.e2e-spec.ts</a:t>
+            </a:r>
+          </a:p>
+          <a:p>
+            <a:pPr marL="0" indent="0">
+              <a:buNone/>
+            </a:pPr>
+            <a:r>
+              <a:rPr lang="en-US" altLang="ko-KR" dirty="0"/>
+              <a:t>│   └── jest-e2e.json</a:t>
+            </a:r>
+          </a:p>
+          <a:p>
+            <a:pPr marL="0" indent="0">
+              <a:buNone/>
+            </a:pPr>
+            <a:r>
+              <a:rPr lang="en-US" altLang="ko-KR" dirty="0"/>
+              <a:t>├── </a:t>
+            </a:r>
+            <a:r>
+              <a:rPr lang="en-US" altLang="ko-KR" dirty="0" err="1"/>
+              <a:t>tsconfig.build.json</a:t>
+            </a:r>
+            <a:endParaRPr lang="en-US" altLang="ko-KR" dirty="0"/>
+          </a:p>
+          <a:p>
+            <a:pPr marL="0" indent="0">
+              <a:buNone/>
+            </a:pPr>
+            <a:r>
+              <a:rPr lang="en-US" altLang="ko-KR" dirty="0"/>
+              <a:t>└── </a:t>
+            </a:r>
+            <a:r>
+              <a:rPr lang="en-US" altLang="ko-KR" dirty="0" err="1"/>
+              <a:t>tsconfig.json</a:t>
+            </a:r>
+            <a:endParaRPr lang="en-US" altLang="ko-KR" dirty="0"/>
+          </a:p>
+        </p:txBody>
+      </p:sp>
     </p:spTree>
     <p:extLst>
       <p:ext uri="{BB962C8B-B14F-4D97-AF65-F5344CB8AC3E}">
-        <p14:creationId xmlns:p14="http://schemas.microsoft.com/office/powerpoint/2010/main" val="1758950953"/>
+        <p14:creationId xmlns:p14="http://schemas.microsoft.com/office/powerpoint/2010/main" val="754481125"/>
       </p:ext>
     </p:extLst>
   </p:cSld>
@@ -3739,7 +3986,7 @@
           <p:cNvPr id="2" name="제목 1">
             <a:extLst>
               <a:ext uri="{FF2B5EF4-FFF2-40B4-BE49-F238E27FC236}">
-                <a16:creationId xmlns:a16="http://schemas.microsoft.com/office/drawing/2014/main" id="{68E61251-C437-7FA4-04EF-2390FC0725AA}"/>
+                <a16:creationId xmlns:a16="http://schemas.microsoft.com/office/drawing/2014/main" id="{1AAF3E13-B0A9-8540-EBA7-EDCB06A07F91}"/>
               </a:ext>
             </a:extLst>
           </p:cNvPr>
@@ -3755,596 +4002,39 @@
           <a:bodyPr/>
           <a:lstStyle/>
           <a:p>
-            <a:r>
-              <a:rPr lang="en-US" altLang="ko-KR" dirty="0" err="1"/>
-              <a:t>VSCode</a:t>
-            </a:r>
-            <a:endParaRPr lang="ko-KR" altLang="en-US" dirty="0"/>
-          </a:p>
-        </p:txBody>
-      </p:sp>
-      <p:pic>
-        <p:nvPicPr>
-          <p:cNvPr id="5" name="내용 개체 틀 4">
-            <a:extLst>
-              <a:ext uri="{FF2B5EF4-FFF2-40B4-BE49-F238E27FC236}">
-                <a16:creationId xmlns:a16="http://schemas.microsoft.com/office/drawing/2014/main" id="{C33CB97F-AA3E-124B-7FE8-8E19BD933C18}"/>
-              </a:ext>
-            </a:extLst>
-          </p:cNvPr>
-          <p:cNvPicPr>
-            <a:picLocks noGrp="1" noChangeAspect="1"/>
-          </p:cNvPicPr>
+            <a:endParaRPr lang="ko-KR" altLang="en-US"/>
+          </a:p>
+        </p:txBody>
+      </p:sp>
+      <p:sp>
+        <p:nvSpPr>
+          <p:cNvPr id="3" name="내용 개체 틀 2">
+            <a:extLst>
+              <a:ext uri="{FF2B5EF4-FFF2-40B4-BE49-F238E27FC236}">
+                <a16:creationId xmlns:a16="http://schemas.microsoft.com/office/drawing/2014/main" id="{70B79641-2C96-8954-D011-65625D68B012}"/>
+              </a:ext>
+            </a:extLst>
+          </p:cNvPr>
+          <p:cNvSpPr>
+            <a:spLocks noGrp="1"/>
+          </p:cNvSpPr>
           <p:nvPr>
             <p:ph idx="1"/>
           </p:nvPr>
-        </p:nvPicPr>
-        <p:blipFill>
-          <a:blip r:embed="rId2"/>
-          <a:stretch>
-            <a:fillRect/>
-          </a:stretch>
-        </p:blipFill>
-        <p:spPr>
-          <a:xfrm>
-            <a:off x="3292013" y="1825625"/>
-            <a:ext cx="5607974" cy="4351338"/>
-          </a:xfrm>
-          <a:prstGeom prst="rect">
-            <a:avLst/>
-          </a:prstGeom>
-        </p:spPr>
-      </p:pic>
+        </p:nvSpPr>
+        <p:spPr/>
+        <p:txBody>
+          <a:bodyPr/>
+          <a:lstStyle/>
+          <a:p>
+            <a:endParaRPr lang="ko-KR" altLang="en-US"/>
+          </a:p>
+        </p:txBody>
+      </p:sp>
     </p:spTree>
     <p:extLst>
       <p:ext uri="{BB962C8B-B14F-4D97-AF65-F5344CB8AC3E}">
-        <p14:creationId xmlns:p14="http://schemas.microsoft.com/office/powerpoint/2010/main" val="1300487083"/>
-      </p:ext>
-    </p:extLst>
-  </p:cSld>
-  <p:clrMapOvr>
-    <a:masterClrMapping/>
-  </p:clrMapOvr>
-</p:sld>
-</file>
-
-<file path=ppt/slides/slide14.xml><?xml version="1.0" encoding="utf-8"?>
-<p:sld xmlns:a="http://schemas.openxmlformats.org/drawingml/2006/main" xmlns:r="http://schemas.openxmlformats.org/officeDocument/2006/relationships" xmlns:p="http://schemas.openxmlformats.org/presentationml/2006/main">
-  <p:cSld>
-    <p:spTree>
-      <p:nvGrpSpPr>
-        <p:cNvPr id="1" name=""/>
-        <p:cNvGrpSpPr/>
-        <p:nvPr/>
-      </p:nvGrpSpPr>
-      <p:grpSpPr>
-        <a:xfrm>
-          <a:off x="0" y="0"/>
-          <a:ext cx="0" cy="0"/>
-          <a:chOff x="0" y="0"/>
-          <a:chExt cx="0" cy="0"/>
-        </a:xfrm>
-      </p:grpSpPr>
-      <p:sp>
-        <p:nvSpPr>
-          <p:cNvPr id="2" name="제목 1">
-            <a:extLst>
-              <a:ext uri="{FF2B5EF4-FFF2-40B4-BE49-F238E27FC236}">
-                <a16:creationId xmlns:a16="http://schemas.microsoft.com/office/drawing/2014/main" id="{FBD5898C-2E89-8FC9-EF52-4F74FE7F9AA0}"/>
-              </a:ext>
-            </a:extLst>
-          </p:cNvPr>
-          <p:cNvSpPr>
-            <a:spLocks noGrp="1"/>
-          </p:cNvSpPr>
-          <p:nvPr>
-            <p:ph type="title"/>
-          </p:nvPr>
-        </p:nvSpPr>
-        <p:spPr/>
-        <p:txBody>
-          <a:bodyPr/>
-          <a:lstStyle/>
-          <a:p>
-            <a:r>
-              <a:rPr lang="en-US" altLang="ko-KR" dirty="0" err="1"/>
-              <a:t>VSCode</a:t>
-            </a:r>
-            <a:endParaRPr lang="ko-KR" altLang="en-US" dirty="0"/>
-          </a:p>
-        </p:txBody>
-      </p:sp>
-      <p:pic>
-        <p:nvPicPr>
-          <p:cNvPr id="5" name="내용 개체 틀 4">
-            <a:extLst>
-              <a:ext uri="{FF2B5EF4-FFF2-40B4-BE49-F238E27FC236}">
-                <a16:creationId xmlns:a16="http://schemas.microsoft.com/office/drawing/2014/main" id="{A55BBCDA-244B-1C40-EB93-361010EAED9E}"/>
-              </a:ext>
-            </a:extLst>
-          </p:cNvPr>
-          <p:cNvPicPr>
-            <a:picLocks noGrp="1" noChangeAspect="1"/>
-          </p:cNvPicPr>
-          <p:nvPr>
-            <p:ph idx="1"/>
-          </p:nvPr>
-        </p:nvPicPr>
-        <p:blipFill>
-          <a:blip r:embed="rId2"/>
-          <a:stretch>
-            <a:fillRect/>
-          </a:stretch>
-        </p:blipFill>
-        <p:spPr>
-          <a:xfrm>
-            <a:off x="3292013" y="1825625"/>
-            <a:ext cx="5607974" cy="4351338"/>
-          </a:xfrm>
-          <a:prstGeom prst="rect">
-            <a:avLst/>
-          </a:prstGeom>
-        </p:spPr>
-      </p:pic>
-    </p:spTree>
-    <p:extLst>
-      <p:ext uri="{BB962C8B-B14F-4D97-AF65-F5344CB8AC3E}">
-        <p14:creationId xmlns:p14="http://schemas.microsoft.com/office/powerpoint/2010/main" val="262610871"/>
-      </p:ext>
-    </p:extLst>
-  </p:cSld>
-  <p:clrMapOvr>
-    <a:masterClrMapping/>
-  </p:clrMapOvr>
-</p:sld>
-</file>
-
-<file path=ppt/slides/slide15.xml><?xml version="1.0" encoding="utf-8"?>
-<p:sld xmlns:a="http://schemas.openxmlformats.org/drawingml/2006/main" xmlns:r="http://schemas.openxmlformats.org/officeDocument/2006/relationships" xmlns:p="http://schemas.openxmlformats.org/presentationml/2006/main">
-  <p:cSld>
-    <p:spTree>
-      <p:nvGrpSpPr>
-        <p:cNvPr id="1" name=""/>
-        <p:cNvGrpSpPr/>
-        <p:nvPr/>
-      </p:nvGrpSpPr>
-      <p:grpSpPr>
-        <a:xfrm>
-          <a:off x="0" y="0"/>
-          <a:ext cx="0" cy="0"/>
-          <a:chOff x="0" y="0"/>
-          <a:chExt cx="0" cy="0"/>
-        </a:xfrm>
-      </p:grpSpPr>
-      <p:sp>
-        <p:nvSpPr>
-          <p:cNvPr id="2" name="제목 1">
-            <a:extLst>
-              <a:ext uri="{FF2B5EF4-FFF2-40B4-BE49-F238E27FC236}">
-                <a16:creationId xmlns:a16="http://schemas.microsoft.com/office/drawing/2014/main" id="{1C2404B6-4BE6-611D-2EA1-0F09F81EAD31}"/>
-              </a:ext>
-            </a:extLst>
-          </p:cNvPr>
-          <p:cNvSpPr>
-            <a:spLocks noGrp="1"/>
-          </p:cNvSpPr>
-          <p:nvPr>
-            <p:ph type="title"/>
-          </p:nvPr>
-        </p:nvSpPr>
-        <p:spPr/>
-        <p:txBody>
-          <a:bodyPr/>
-          <a:lstStyle/>
-          <a:p>
-            <a:r>
-              <a:rPr lang="en-US" altLang="ko-KR" dirty="0" err="1"/>
-              <a:t>VSCode</a:t>
-            </a:r>
-            <a:endParaRPr lang="ko-KR" altLang="en-US" dirty="0"/>
-          </a:p>
-        </p:txBody>
-      </p:sp>
-      <p:pic>
-        <p:nvPicPr>
-          <p:cNvPr id="5" name="내용 개체 틀 4">
-            <a:extLst>
-              <a:ext uri="{FF2B5EF4-FFF2-40B4-BE49-F238E27FC236}">
-                <a16:creationId xmlns:a16="http://schemas.microsoft.com/office/drawing/2014/main" id="{E47EEC3D-588F-09D6-F7E8-326468743096}"/>
-              </a:ext>
-            </a:extLst>
-          </p:cNvPr>
-          <p:cNvPicPr>
-            <a:picLocks noGrp="1" noChangeAspect="1"/>
-          </p:cNvPicPr>
-          <p:nvPr>
-            <p:ph idx="1"/>
-          </p:nvPr>
-        </p:nvPicPr>
-        <p:blipFill>
-          <a:blip r:embed="rId2"/>
-          <a:stretch>
-            <a:fillRect/>
-          </a:stretch>
-        </p:blipFill>
-        <p:spPr>
-          <a:xfrm>
-            <a:off x="3292013" y="1825625"/>
-            <a:ext cx="5607974" cy="4351338"/>
-          </a:xfrm>
-          <a:prstGeom prst="rect">
-            <a:avLst/>
-          </a:prstGeom>
-        </p:spPr>
-      </p:pic>
-    </p:spTree>
-    <p:extLst>
-      <p:ext uri="{BB962C8B-B14F-4D97-AF65-F5344CB8AC3E}">
-        <p14:creationId xmlns:p14="http://schemas.microsoft.com/office/powerpoint/2010/main" val="4027895067"/>
-      </p:ext>
-    </p:extLst>
-  </p:cSld>
-  <p:clrMapOvr>
-    <a:masterClrMapping/>
-  </p:clrMapOvr>
-</p:sld>
-</file>
-
-<file path=ppt/slides/slide16.xml><?xml version="1.0" encoding="utf-8"?>
-<p:sld xmlns:a="http://schemas.openxmlformats.org/drawingml/2006/main" xmlns:r="http://schemas.openxmlformats.org/officeDocument/2006/relationships" xmlns:p="http://schemas.openxmlformats.org/presentationml/2006/main">
-  <p:cSld>
-    <p:spTree>
-      <p:nvGrpSpPr>
-        <p:cNvPr id="1" name=""/>
-        <p:cNvGrpSpPr/>
-        <p:nvPr/>
-      </p:nvGrpSpPr>
-      <p:grpSpPr>
-        <a:xfrm>
-          <a:off x="0" y="0"/>
-          <a:ext cx="0" cy="0"/>
-          <a:chOff x="0" y="0"/>
-          <a:chExt cx="0" cy="0"/>
-        </a:xfrm>
-      </p:grpSpPr>
-      <p:sp>
-        <p:nvSpPr>
-          <p:cNvPr id="2" name="제목 1">
-            <a:extLst>
-              <a:ext uri="{FF2B5EF4-FFF2-40B4-BE49-F238E27FC236}">
-                <a16:creationId xmlns:a16="http://schemas.microsoft.com/office/drawing/2014/main" id="{C96508CC-F0E5-314E-5A8D-A4E0CED28CCA}"/>
-              </a:ext>
-            </a:extLst>
-          </p:cNvPr>
-          <p:cNvSpPr>
-            <a:spLocks noGrp="1"/>
-          </p:cNvSpPr>
-          <p:nvPr>
-            <p:ph type="title"/>
-          </p:nvPr>
-        </p:nvSpPr>
-        <p:spPr/>
-        <p:txBody>
-          <a:bodyPr/>
-          <a:lstStyle/>
-          <a:p>
-            <a:r>
-              <a:rPr lang="en-US" altLang="ko-KR" dirty="0" err="1"/>
-              <a:t>VSCode</a:t>
-            </a:r>
-            <a:endParaRPr lang="ko-KR" altLang="en-US" dirty="0"/>
-          </a:p>
-        </p:txBody>
-      </p:sp>
-      <p:pic>
-        <p:nvPicPr>
-          <p:cNvPr id="5" name="내용 개체 틀 4">
-            <a:extLst>
-              <a:ext uri="{FF2B5EF4-FFF2-40B4-BE49-F238E27FC236}">
-                <a16:creationId xmlns:a16="http://schemas.microsoft.com/office/drawing/2014/main" id="{38C65331-2585-D90F-F6A4-29109EB083ED}"/>
-              </a:ext>
-            </a:extLst>
-          </p:cNvPr>
-          <p:cNvPicPr>
-            <a:picLocks noGrp="1" noChangeAspect="1"/>
-          </p:cNvPicPr>
-          <p:nvPr>
-            <p:ph idx="1"/>
-          </p:nvPr>
-        </p:nvPicPr>
-        <p:blipFill>
-          <a:blip r:embed="rId2"/>
-          <a:stretch>
-            <a:fillRect/>
-          </a:stretch>
-        </p:blipFill>
-        <p:spPr>
-          <a:xfrm>
-            <a:off x="3292013" y="1825625"/>
-            <a:ext cx="5607974" cy="4351338"/>
-          </a:xfrm>
-          <a:prstGeom prst="rect">
-            <a:avLst/>
-          </a:prstGeom>
-        </p:spPr>
-      </p:pic>
-    </p:spTree>
-    <p:extLst>
-      <p:ext uri="{BB962C8B-B14F-4D97-AF65-F5344CB8AC3E}">
-        <p14:creationId xmlns:p14="http://schemas.microsoft.com/office/powerpoint/2010/main" val="1056946319"/>
-      </p:ext>
-    </p:extLst>
-  </p:cSld>
-  <p:clrMapOvr>
-    <a:masterClrMapping/>
-  </p:clrMapOvr>
-</p:sld>
-</file>
-
-<file path=ppt/slides/slide17.xml><?xml version="1.0" encoding="utf-8"?>
-<p:sld xmlns:a="http://schemas.openxmlformats.org/drawingml/2006/main" xmlns:r="http://schemas.openxmlformats.org/officeDocument/2006/relationships" xmlns:p="http://schemas.openxmlformats.org/presentationml/2006/main">
-  <p:cSld>
-    <p:spTree>
-      <p:nvGrpSpPr>
-        <p:cNvPr id="1" name=""/>
-        <p:cNvGrpSpPr/>
-        <p:nvPr/>
-      </p:nvGrpSpPr>
-      <p:grpSpPr>
-        <a:xfrm>
-          <a:off x="0" y="0"/>
-          <a:ext cx="0" cy="0"/>
-          <a:chOff x="0" y="0"/>
-          <a:chExt cx="0" cy="0"/>
-        </a:xfrm>
-      </p:grpSpPr>
-      <p:sp>
-        <p:nvSpPr>
-          <p:cNvPr id="2" name="제목 1">
-            <a:extLst>
-              <a:ext uri="{FF2B5EF4-FFF2-40B4-BE49-F238E27FC236}">
-                <a16:creationId xmlns:a16="http://schemas.microsoft.com/office/drawing/2014/main" id="{634D5362-88E2-8553-DC0C-B2A60BB5C81F}"/>
-              </a:ext>
-            </a:extLst>
-          </p:cNvPr>
-          <p:cNvSpPr>
-            <a:spLocks noGrp="1"/>
-          </p:cNvSpPr>
-          <p:nvPr>
-            <p:ph type="title"/>
-          </p:nvPr>
-        </p:nvSpPr>
-        <p:spPr/>
-        <p:txBody>
-          <a:bodyPr/>
-          <a:lstStyle/>
-          <a:p>
-            <a:r>
-              <a:rPr lang="en-US" altLang="ko-KR" dirty="0" err="1"/>
-              <a:t>VSCode</a:t>
-            </a:r>
-            <a:endParaRPr lang="ko-KR" altLang="en-US" dirty="0"/>
-          </a:p>
-        </p:txBody>
-      </p:sp>
-      <p:pic>
-        <p:nvPicPr>
-          <p:cNvPr id="5" name="내용 개체 틀 4">
-            <a:extLst>
-              <a:ext uri="{FF2B5EF4-FFF2-40B4-BE49-F238E27FC236}">
-                <a16:creationId xmlns:a16="http://schemas.microsoft.com/office/drawing/2014/main" id="{76FEDBDA-715D-1EF5-22D9-8732D32F2C26}"/>
-              </a:ext>
-            </a:extLst>
-          </p:cNvPr>
-          <p:cNvPicPr>
-            <a:picLocks noGrp="1" noChangeAspect="1"/>
-          </p:cNvPicPr>
-          <p:nvPr>
-            <p:ph idx="1"/>
-          </p:nvPr>
-        </p:nvPicPr>
-        <p:blipFill>
-          <a:blip r:embed="rId2"/>
-          <a:stretch>
-            <a:fillRect/>
-          </a:stretch>
-        </p:blipFill>
-        <p:spPr>
-          <a:xfrm>
-            <a:off x="3292013" y="1825625"/>
-            <a:ext cx="5607974" cy="4351338"/>
-          </a:xfrm>
-          <a:prstGeom prst="rect">
-            <a:avLst/>
-          </a:prstGeom>
-        </p:spPr>
-      </p:pic>
-    </p:spTree>
-    <p:extLst>
-      <p:ext uri="{BB962C8B-B14F-4D97-AF65-F5344CB8AC3E}">
-        <p14:creationId xmlns:p14="http://schemas.microsoft.com/office/powerpoint/2010/main" val="1112821648"/>
-      </p:ext>
-    </p:extLst>
-  </p:cSld>
-  <p:clrMapOvr>
-    <a:masterClrMapping/>
-  </p:clrMapOvr>
-</p:sld>
-</file>
-
-<file path=ppt/slides/slide18.xml><?xml version="1.0" encoding="utf-8"?>
-<p:sld xmlns:a="http://schemas.openxmlformats.org/drawingml/2006/main" xmlns:r="http://schemas.openxmlformats.org/officeDocument/2006/relationships" xmlns:p="http://schemas.openxmlformats.org/presentationml/2006/main">
-  <p:cSld>
-    <p:spTree>
-      <p:nvGrpSpPr>
-        <p:cNvPr id="1" name=""/>
-        <p:cNvGrpSpPr/>
-        <p:nvPr/>
-      </p:nvGrpSpPr>
-      <p:grpSpPr>
-        <a:xfrm>
-          <a:off x="0" y="0"/>
-          <a:ext cx="0" cy="0"/>
-          <a:chOff x="0" y="0"/>
-          <a:chExt cx="0" cy="0"/>
-        </a:xfrm>
-      </p:grpSpPr>
-      <p:sp>
-        <p:nvSpPr>
-          <p:cNvPr id="2" name="제목 1">
-            <a:extLst>
-              <a:ext uri="{FF2B5EF4-FFF2-40B4-BE49-F238E27FC236}">
-                <a16:creationId xmlns:a16="http://schemas.microsoft.com/office/drawing/2014/main" id="{724DDB08-D8EF-A5F6-8E84-3930AD127323}"/>
-              </a:ext>
-            </a:extLst>
-          </p:cNvPr>
-          <p:cNvSpPr>
-            <a:spLocks noGrp="1"/>
-          </p:cNvSpPr>
-          <p:nvPr>
-            <p:ph type="title"/>
-          </p:nvPr>
-        </p:nvSpPr>
-        <p:spPr/>
-        <p:txBody>
-          <a:bodyPr/>
-          <a:lstStyle/>
-          <a:p>
-            <a:r>
-              <a:rPr lang="en-US" altLang="ko-KR" dirty="0" err="1"/>
-              <a:t>VSCode</a:t>
-            </a:r>
-            <a:endParaRPr lang="ko-KR" altLang="en-US" dirty="0"/>
-          </a:p>
-        </p:txBody>
-      </p:sp>
-      <p:pic>
-        <p:nvPicPr>
-          <p:cNvPr id="5" name="내용 개체 틀 4">
-            <a:extLst>
-              <a:ext uri="{FF2B5EF4-FFF2-40B4-BE49-F238E27FC236}">
-                <a16:creationId xmlns:a16="http://schemas.microsoft.com/office/drawing/2014/main" id="{3238D8F8-DB01-BA4C-C1AF-1ECC2E97DD20}"/>
-              </a:ext>
-            </a:extLst>
-          </p:cNvPr>
-          <p:cNvPicPr>
-            <a:picLocks noGrp="1" noChangeAspect="1"/>
-          </p:cNvPicPr>
-          <p:nvPr>
-            <p:ph idx="1"/>
-          </p:nvPr>
-        </p:nvPicPr>
-        <p:blipFill>
-          <a:blip r:embed="rId2"/>
-          <a:stretch>
-            <a:fillRect/>
-          </a:stretch>
-        </p:blipFill>
-        <p:spPr>
-          <a:xfrm>
-            <a:off x="3292013" y="1825625"/>
-            <a:ext cx="5607974" cy="4351338"/>
-          </a:xfrm>
-          <a:prstGeom prst="rect">
-            <a:avLst/>
-          </a:prstGeom>
-        </p:spPr>
-      </p:pic>
-    </p:spTree>
-    <p:extLst>
-      <p:ext uri="{BB962C8B-B14F-4D97-AF65-F5344CB8AC3E}">
-        <p14:creationId xmlns:p14="http://schemas.microsoft.com/office/powerpoint/2010/main" val="2178482529"/>
-      </p:ext>
-    </p:extLst>
-  </p:cSld>
-  <p:clrMapOvr>
-    <a:masterClrMapping/>
-  </p:clrMapOvr>
-</p:sld>
-</file>
-
-<file path=ppt/slides/slide19.xml><?xml version="1.0" encoding="utf-8"?>
-<p:sld xmlns:a="http://schemas.openxmlformats.org/drawingml/2006/main" xmlns:r="http://schemas.openxmlformats.org/officeDocument/2006/relationships" xmlns:p="http://schemas.openxmlformats.org/presentationml/2006/main">
-  <p:cSld>
-    <p:spTree>
-      <p:nvGrpSpPr>
-        <p:cNvPr id="1" name=""/>
-        <p:cNvGrpSpPr/>
-        <p:nvPr/>
-      </p:nvGrpSpPr>
-      <p:grpSpPr>
-        <a:xfrm>
-          <a:off x="0" y="0"/>
-          <a:ext cx="0" cy="0"/>
-          <a:chOff x="0" y="0"/>
-          <a:chExt cx="0" cy="0"/>
-        </a:xfrm>
-      </p:grpSpPr>
-      <p:sp>
-        <p:nvSpPr>
-          <p:cNvPr id="2" name="제목 1">
-            <a:extLst>
-              <a:ext uri="{FF2B5EF4-FFF2-40B4-BE49-F238E27FC236}">
-                <a16:creationId xmlns:a16="http://schemas.microsoft.com/office/drawing/2014/main" id="{69E0D944-53C1-262B-DB49-D1FB8357C30B}"/>
-              </a:ext>
-            </a:extLst>
-          </p:cNvPr>
-          <p:cNvSpPr>
-            <a:spLocks noGrp="1"/>
-          </p:cNvSpPr>
-          <p:nvPr>
-            <p:ph type="title"/>
-          </p:nvPr>
-        </p:nvSpPr>
-        <p:spPr/>
-        <p:txBody>
-          <a:bodyPr/>
-          <a:lstStyle/>
-          <a:p>
-            <a:r>
-              <a:rPr lang="en-US" altLang="ko-KR" dirty="0" err="1"/>
-              <a:t>VSCode</a:t>
-            </a:r>
-            <a:endParaRPr lang="ko-KR" altLang="en-US" dirty="0"/>
-          </a:p>
-        </p:txBody>
-      </p:sp>
-      <p:pic>
-        <p:nvPicPr>
-          <p:cNvPr id="5" name="내용 개체 틀 4">
-            <a:extLst>
-              <a:ext uri="{FF2B5EF4-FFF2-40B4-BE49-F238E27FC236}">
-                <a16:creationId xmlns:a16="http://schemas.microsoft.com/office/drawing/2014/main" id="{F239D2B4-8CDF-3105-ABCE-93CC872ABD06}"/>
-              </a:ext>
-            </a:extLst>
-          </p:cNvPr>
-          <p:cNvPicPr>
-            <a:picLocks noGrp="1" noChangeAspect="1"/>
-          </p:cNvPicPr>
-          <p:nvPr>
-            <p:ph idx="1"/>
-          </p:nvPr>
-        </p:nvPicPr>
-        <p:blipFill>
-          <a:blip r:embed="rId2"/>
-          <a:stretch>
-            <a:fillRect/>
-          </a:stretch>
-        </p:blipFill>
-        <p:spPr>
-          <a:xfrm>
-            <a:off x="3292013" y="1825625"/>
-            <a:ext cx="5607974" cy="4351338"/>
-          </a:xfrm>
-          <a:prstGeom prst="rect">
-            <a:avLst/>
-          </a:prstGeom>
-        </p:spPr>
-      </p:pic>
-    </p:spTree>
-    <p:extLst>
-      <p:ext uri="{BB962C8B-B14F-4D97-AF65-F5344CB8AC3E}">
-        <p14:creationId xmlns:p14="http://schemas.microsoft.com/office/powerpoint/2010/main" val="238489830"/>
+        <p14:creationId xmlns:p14="http://schemas.microsoft.com/office/powerpoint/2010/main" val="2438987629"/>
       </p:ext>
     </p:extLst>
   </p:cSld>
@@ -4436,97 +4126,6 @@
     <p:extLst>
       <p:ext uri="{BB962C8B-B14F-4D97-AF65-F5344CB8AC3E}">
         <p14:creationId xmlns:p14="http://schemas.microsoft.com/office/powerpoint/2010/main" val="4155212163"/>
-      </p:ext>
-    </p:extLst>
-  </p:cSld>
-  <p:clrMapOvr>
-    <a:masterClrMapping/>
-  </p:clrMapOvr>
-</p:sld>
-</file>
-
-<file path=ppt/slides/slide20.xml><?xml version="1.0" encoding="utf-8"?>
-<p:sld xmlns:a="http://schemas.openxmlformats.org/drawingml/2006/main" xmlns:r="http://schemas.openxmlformats.org/officeDocument/2006/relationships" xmlns:p="http://schemas.openxmlformats.org/presentationml/2006/main">
-  <p:cSld>
-    <p:spTree>
-      <p:nvGrpSpPr>
-        <p:cNvPr id="1" name=""/>
-        <p:cNvGrpSpPr/>
-        <p:nvPr/>
-      </p:nvGrpSpPr>
-      <p:grpSpPr>
-        <a:xfrm>
-          <a:off x="0" y="0"/>
-          <a:ext cx="0" cy="0"/>
-          <a:chOff x="0" y="0"/>
-          <a:chExt cx="0" cy="0"/>
-        </a:xfrm>
-      </p:grpSpPr>
-      <p:sp>
-        <p:nvSpPr>
-          <p:cNvPr id="2" name="제목 1">
-            <a:extLst>
-              <a:ext uri="{FF2B5EF4-FFF2-40B4-BE49-F238E27FC236}">
-                <a16:creationId xmlns:a16="http://schemas.microsoft.com/office/drawing/2014/main" id="{CEF16860-3D17-A741-D237-ACDFF39BE25B}"/>
-              </a:ext>
-            </a:extLst>
-          </p:cNvPr>
-          <p:cNvSpPr>
-            <a:spLocks noGrp="1"/>
-          </p:cNvSpPr>
-          <p:nvPr>
-            <p:ph type="title"/>
-          </p:nvPr>
-        </p:nvSpPr>
-        <p:spPr/>
-        <p:txBody>
-          <a:bodyPr/>
-          <a:lstStyle/>
-          <a:p>
-            <a:r>
-              <a:rPr lang="en-US" altLang="ko-KR"/>
-              <a:t>VSCode</a:t>
-            </a:r>
-            <a:endParaRPr lang="ko-KR" altLang="en-US"/>
-          </a:p>
-        </p:txBody>
-      </p:sp>
-      <p:pic>
-        <p:nvPicPr>
-          <p:cNvPr id="5" name="내용 개체 틀 4">
-            <a:extLst>
-              <a:ext uri="{FF2B5EF4-FFF2-40B4-BE49-F238E27FC236}">
-                <a16:creationId xmlns:a16="http://schemas.microsoft.com/office/drawing/2014/main" id="{2332EE4A-8580-F0E0-BD4F-EC29E539DACB}"/>
-              </a:ext>
-            </a:extLst>
-          </p:cNvPr>
-          <p:cNvPicPr>
-            <a:picLocks noGrp="1" noChangeAspect="1"/>
-          </p:cNvPicPr>
-          <p:nvPr>
-            <p:ph idx="1"/>
-          </p:nvPr>
-        </p:nvPicPr>
-        <p:blipFill>
-          <a:blip r:embed="rId2"/>
-          <a:stretch>
-            <a:fillRect/>
-          </a:stretch>
-        </p:blipFill>
-        <p:spPr>
-          <a:xfrm>
-            <a:off x="2832496" y="1825625"/>
-            <a:ext cx="6527007" cy="4351338"/>
-          </a:xfrm>
-          <a:prstGeom prst="rect">
-            <a:avLst/>
-          </a:prstGeom>
-        </p:spPr>
-      </p:pic>
-    </p:spTree>
-    <p:extLst>
-      <p:ext uri="{BB962C8B-B14F-4D97-AF65-F5344CB8AC3E}">
-        <p14:creationId xmlns:p14="http://schemas.microsoft.com/office/powerpoint/2010/main" val="348008065"/>
       </p:ext>
     </p:extLst>
   </p:cSld>

--- a/doc/개발환경_설치매뉴얼(Node.JS).pptx
+++ b/doc/개발환경_설치매뉴얼(Node.JS).pptx
@@ -4027,7 +4027,31 @@
           <a:bodyPr/>
           <a:lstStyle/>
           <a:p>
-            <a:endParaRPr lang="ko-KR" altLang="en-US"/>
+            <a:r>
+              <a:rPr lang="en-US" altLang="ko-KR" dirty="0"/>
+              <a:t>$ </a:t>
+            </a:r>
+            <a:r>
+              <a:rPr lang="en-US" altLang="ko-KR" dirty="0" err="1"/>
+              <a:t>npm</a:t>
+            </a:r>
+            <a:r>
+              <a:rPr lang="ko-KR" altLang="en-US" dirty="0"/>
+              <a:t> </a:t>
+            </a:r>
+            <a:r>
+              <a:rPr lang="en-US" altLang="ko-KR" dirty="0"/>
+              <a:t>run</a:t>
+            </a:r>
+            <a:r>
+              <a:rPr lang="ko-KR" altLang="en-US" dirty="0"/>
+              <a:t> </a:t>
+            </a:r>
+            <a:r>
+              <a:rPr lang="en-US" altLang="ko-KR" dirty="0" err="1"/>
+              <a:t>start:dev</a:t>
+            </a:r>
+            <a:endParaRPr lang="ko-KR" altLang="en-US" dirty="0"/>
           </a:p>
         </p:txBody>
       </p:sp>

--- a/doc/개발환경_설치매뉴얼(Node.JS).pptx
+++ b/doc/개발환경_설치매뉴얼(Node.JS).pptx
@@ -16,8 +16,7 @@
     <p:sldId id="264" r:id="rId10"/>
     <p:sldId id="265" r:id="rId11"/>
     <p:sldId id="275" r:id="rId12"/>
-    <p:sldId id="276" r:id="rId13"/>
-    <p:sldId id="277" r:id="rId14"/>
+    <p:sldId id="277" r:id="rId13"/>
   </p:sldIdLst>
   <p:sldSz cx="12192000" cy="6858000"/>
   <p:notesSz cx="6858000" cy="9144000"/>
@@ -271,7 +270,7 @@
           <a:p>
             <a:fld id="{7359EE32-49FD-4EA7-9011-353EB936649F}" type="datetimeFigureOut">
               <a:rPr lang="ko-KR" altLang="en-US" smtClean="0"/>
-              <a:t>2025-09-03</a:t>
+              <a:t>2025-09-07</a:t>
             </a:fld>
             <a:endParaRPr lang="ko-KR" altLang="en-US"/>
           </a:p>
@@ -469,7 +468,7 @@
           <a:p>
             <a:fld id="{7359EE32-49FD-4EA7-9011-353EB936649F}" type="datetimeFigureOut">
               <a:rPr lang="ko-KR" altLang="en-US" smtClean="0"/>
-              <a:t>2025-09-03</a:t>
+              <a:t>2025-09-07</a:t>
             </a:fld>
             <a:endParaRPr lang="ko-KR" altLang="en-US"/>
           </a:p>
@@ -677,7 +676,7 @@
           <a:p>
             <a:fld id="{7359EE32-49FD-4EA7-9011-353EB936649F}" type="datetimeFigureOut">
               <a:rPr lang="ko-KR" altLang="en-US" smtClean="0"/>
-              <a:t>2025-09-03</a:t>
+              <a:t>2025-09-07</a:t>
             </a:fld>
             <a:endParaRPr lang="ko-KR" altLang="en-US"/>
           </a:p>
@@ -875,7 +874,7 @@
           <a:p>
             <a:fld id="{7359EE32-49FD-4EA7-9011-353EB936649F}" type="datetimeFigureOut">
               <a:rPr lang="ko-KR" altLang="en-US" smtClean="0"/>
-              <a:t>2025-09-03</a:t>
+              <a:t>2025-09-07</a:t>
             </a:fld>
             <a:endParaRPr lang="ko-KR" altLang="en-US"/>
           </a:p>
@@ -1150,7 +1149,7 @@
           <a:p>
             <a:fld id="{7359EE32-49FD-4EA7-9011-353EB936649F}" type="datetimeFigureOut">
               <a:rPr lang="ko-KR" altLang="en-US" smtClean="0"/>
-              <a:t>2025-09-03</a:t>
+              <a:t>2025-09-07</a:t>
             </a:fld>
             <a:endParaRPr lang="ko-KR" altLang="en-US"/>
           </a:p>
@@ -1415,7 +1414,7 @@
           <a:p>
             <a:fld id="{7359EE32-49FD-4EA7-9011-353EB936649F}" type="datetimeFigureOut">
               <a:rPr lang="ko-KR" altLang="en-US" smtClean="0"/>
-              <a:t>2025-09-03</a:t>
+              <a:t>2025-09-07</a:t>
             </a:fld>
             <a:endParaRPr lang="ko-KR" altLang="en-US"/>
           </a:p>
@@ -1827,7 +1826,7 @@
           <a:p>
             <a:fld id="{7359EE32-49FD-4EA7-9011-353EB936649F}" type="datetimeFigureOut">
               <a:rPr lang="ko-KR" altLang="en-US" smtClean="0"/>
-              <a:t>2025-09-03</a:t>
+              <a:t>2025-09-07</a:t>
             </a:fld>
             <a:endParaRPr lang="ko-KR" altLang="en-US"/>
           </a:p>
@@ -1968,7 +1967,7 @@
           <a:p>
             <a:fld id="{7359EE32-49FD-4EA7-9011-353EB936649F}" type="datetimeFigureOut">
               <a:rPr lang="ko-KR" altLang="en-US" smtClean="0"/>
-              <a:t>2025-09-03</a:t>
+              <a:t>2025-09-07</a:t>
             </a:fld>
             <a:endParaRPr lang="ko-KR" altLang="en-US"/>
           </a:p>
@@ -2081,7 +2080,7 @@
           <a:p>
             <a:fld id="{7359EE32-49FD-4EA7-9011-353EB936649F}" type="datetimeFigureOut">
               <a:rPr lang="ko-KR" altLang="en-US" smtClean="0"/>
-              <a:t>2025-09-03</a:t>
+              <a:t>2025-09-07</a:t>
             </a:fld>
             <a:endParaRPr lang="ko-KR" altLang="en-US"/>
           </a:p>
@@ -2392,7 +2391,7 @@
           <a:p>
             <a:fld id="{7359EE32-49FD-4EA7-9011-353EB936649F}" type="datetimeFigureOut">
               <a:rPr lang="ko-KR" altLang="en-US" smtClean="0"/>
-              <a:t>2025-09-03</a:t>
+              <a:t>2025-09-07</a:t>
             </a:fld>
             <a:endParaRPr lang="ko-KR" altLang="en-US"/>
           </a:p>
@@ -2680,7 +2679,7 @@
           <a:p>
             <a:fld id="{7359EE32-49FD-4EA7-9011-353EB936649F}" type="datetimeFigureOut">
               <a:rPr lang="ko-KR" altLang="en-US" smtClean="0"/>
-              <a:t>2025-09-03</a:t>
+              <a:t>2025-09-07</a:t>
             </a:fld>
             <a:endParaRPr lang="ko-KR" altLang="en-US"/>
           </a:p>
@@ -2921,7 +2920,7 @@
           <a:p>
             <a:fld id="{7359EE32-49FD-4EA7-9011-353EB936649F}" type="datetimeFigureOut">
               <a:rPr lang="ko-KR" altLang="en-US" smtClean="0"/>
-              <a:t>2025-09-03</a:t>
+              <a:t>2025-09-07</a:t>
             </a:fld>
             <a:endParaRPr lang="ko-KR" altLang="en-US"/>
           </a:p>
@@ -3667,7 +3666,7 @@
           <p:cNvPr id="2" name="제목 1">
             <a:extLst>
               <a:ext uri="{FF2B5EF4-FFF2-40B4-BE49-F238E27FC236}">
-                <a16:creationId xmlns:a16="http://schemas.microsoft.com/office/drawing/2014/main" id="{C4C31A83-235A-D249-0815-11BFDE45EF1C}"/>
+                <a16:creationId xmlns:a16="http://schemas.microsoft.com/office/drawing/2014/main" id="{1AAF3E13-B0A9-8540-EBA7-EDCB06A07F91}"/>
               </a:ext>
             </a:extLst>
           </p:cNvPr>
@@ -3683,11 +3682,7 @@
           <a:bodyPr/>
           <a:lstStyle/>
           <a:p>
-            <a:r>
-              <a:rPr lang="en-US" altLang="ko-KR" dirty="0" err="1"/>
-              <a:t>NestJS</a:t>
-            </a:r>
-            <a:endParaRPr lang="ko-KR" altLang="en-US" dirty="0"/>
+            <a:endParaRPr lang="ko-KR" altLang="en-US"/>
           </a:p>
         </p:txBody>
       </p:sp>
@@ -3696,7 +3691,7 @@
           <p:cNvPr id="3" name="내용 개체 틀 2">
             <a:extLst>
               <a:ext uri="{FF2B5EF4-FFF2-40B4-BE49-F238E27FC236}">
-                <a16:creationId xmlns:a16="http://schemas.microsoft.com/office/drawing/2014/main" id="{373CC9B8-F768-BBB9-2725-03ED4DE43A71}"/>
+                <a16:creationId xmlns:a16="http://schemas.microsoft.com/office/drawing/2014/main" id="{70B79641-2C96-8954-D011-65625D68B012}"/>
               </a:ext>
             </a:extLst>
           </p:cNvPr>
@@ -3709,324 +3704,17 @@
         </p:nvSpPr>
         <p:spPr/>
         <p:txBody>
-          <a:bodyPr>
-            <a:normAutofit fontScale="32500" lnSpcReduction="20000"/>
-          </a:bodyPr>
-          <a:lstStyle/>
-          <a:p>
-            <a:pPr marL="0" indent="0">
-              <a:buNone/>
-            </a:pPr>
-            <a:r>
-              <a:rPr lang="en-US" altLang="ko-KR" dirty="0"/>
-              <a:t>$ </a:t>
-            </a:r>
-            <a:r>
-              <a:rPr lang="en-US" altLang="ko-KR" dirty="0" err="1"/>
-              <a:t>npm</a:t>
-            </a:r>
-            <a:r>
-              <a:rPr lang="en-US" altLang="ko-KR" dirty="0"/>
-              <a:t> I –g @nestjs/cli</a:t>
-            </a:r>
-          </a:p>
-          <a:p>
-            <a:pPr marL="0" indent="0">
-              <a:buNone/>
-            </a:pPr>
-            <a:r>
-              <a:rPr lang="en-US" altLang="ko-KR" dirty="0"/>
-              <a:t>$ nest new {project-name}</a:t>
-            </a:r>
-          </a:p>
-          <a:p>
-            <a:pPr marL="0" indent="0">
-              <a:buNone/>
-            </a:pPr>
+          <a:bodyPr/>
+          <a:lstStyle/>
+          <a:p>
+            <a:r>
+              <a:rPr lang="ko-KR" altLang="en-US" dirty="0"/>
+              <a:t>프로그램 실행</a:t>
+            </a:r>
             <a:endParaRPr lang="en-US" altLang="ko-KR" dirty="0"/>
           </a:p>
           <a:p>
-            <a:pPr marL="0" indent="0">
-              <a:buNone/>
-            </a:pPr>
-            <a:r>
-              <a:rPr lang="en-US" altLang="ko-KR" dirty="0"/>
-              <a:t>├── README.md</a:t>
-            </a:r>
-          </a:p>
-          <a:p>
-            <a:pPr marL="0" indent="0">
-              <a:buNone/>
-            </a:pPr>
-            <a:r>
-              <a:rPr lang="en-US" altLang="ko-KR" dirty="0"/>
-              <a:t>├── nest-</a:t>
-            </a:r>
-            <a:r>
-              <a:rPr lang="en-US" altLang="ko-KR" dirty="0" err="1"/>
-              <a:t>cli.json</a:t>
-            </a:r>
-            <a:endParaRPr lang="en-US" altLang="ko-KR" dirty="0"/>
-          </a:p>
-          <a:p>
-            <a:pPr marL="0" indent="0">
-              <a:buNone/>
-            </a:pPr>
-            <a:r>
-              <a:rPr lang="en-US" altLang="ko-KR" dirty="0"/>
-              <a:t>├── </a:t>
-            </a:r>
-            <a:r>
-              <a:rPr lang="en-US" altLang="ko-KR" dirty="0" err="1"/>
-              <a:t>node_modules</a:t>
-            </a:r>
-            <a:endParaRPr lang="en-US" altLang="ko-KR" dirty="0"/>
-          </a:p>
-          <a:p>
-            <a:pPr marL="0" indent="0">
-              <a:buNone/>
-            </a:pPr>
-            <a:r>
-              <a:rPr lang="en-US" altLang="ko-KR" dirty="0"/>
-              <a:t>├── package-</a:t>
-            </a:r>
-            <a:r>
-              <a:rPr lang="en-US" altLang="ko-KR" dirty="0" err="1"/>
-              <a:t>lock.json</a:t>
-            </a:r>
-            <a:endParaRPr lang="en-US" altLang="ko-KR" dirty="0"/>
-          </a:p>
-          <a:p>
-            <a:pPr marL="0" indent="0">
-              <a:buNone/>
-            </a:pPr>
-            <a:r>
-              <a:rPr lang="en-US" altLang="ko-KR" dirty="0"/>
-              <a:t>├── </a:t>
-            </a:r>
-            <a:r>
-              <a:rPr lang="en-US" altLang="ko-KR" dirty="0" err="1"/>
-              <a:t>package.json</a:t>
-            </a:r>
-            <a:endParaRPr lang="en-US" altLang="ko-KR" dirty="0"/>
-          </a:p>
-          <a:p>
-            <a:pPr marL="0" indent="0">
-              <a:buNone/>
-            </a:pPr>
-            <a:r>
-              <a:rPr lang="en-US" altLang="ko-KR" dirty="0"/>
-              <a:t>├── </a:t>
-            </a:r>
-            <a:r>
-              <a:rPr lang="en-US" altLang="ko-KR" dirty="0" err="1"/>
-              <a:t>src</a:t>
-            </a:r>
-            <a:endParaRPr lang="en-US" altLang="ko-KR" dirty="0"/>
-          </a:p>
-          <a:p>
-            <a:pPr marL="0" indent="0">
-              <a:buNone/>
-            </a:pPr>
-            <a:r>
-              <a:rPr lang="en-US" altLang="ko-KR" dirty="0"/>
-              <a:t>│   ├── </a:t>
-            </a:r>
-            <a:r>
-              <a:rPr lang="en-US" altLang="ko-KR" dirty="0" err="1"/>
-              <a:t>app.controller.spec.ts</a:t>
-            </a:r>
-            <a:endParaRPr lang="en-US" altLang="ko-KR" dirty="0"/>
-          </a:p>
-          <a:p>
-            <a:pPr marL="0" indent="0">
-              <a:buNone/>
-            </a:pPr>
-            <a:r>
-              <a:rPr lang="en-US" altLang="ko-KR" dirty="0"/>
-              <a:t>│   ├── </a:t>
-            </a:r>
-            <a:r>
-              <a:rPr lang="en-US" altLang="ko-KR" dirty="0" err="1"/>
-              <a:t>app.controller.ts</a:t>
-            </a:r>
-            <a:endParaRPr lang="en-US" altLang="ko-KR" dirty="0"/>
-          </a:p>
-          <a:p>
-            <a:pPr marL="0" indent="0">
-              <a:buNone/>
-            </a:pPr>
-            <a:r>
-              <a:rPr lang="en-US" altLang="ko-KR" dirty="0"/>
-              <a:t>│   ├── </a:t>
-            </a:r>
-            <a:r>
-              <a:rPr lang="en-US" altLang="ko-KR" dirty="0" err="1"/>
-              <a:t>app.module.ts</a:t>
-            </a:r>
-            <a:endParaRPr lang="en-US" altLang="ko-KR" dirty="0"/>
-          </a:p>
-          <a:p>
-            <a:pPr marL="0" indent="0">
-              <a:buNone/>
-            </a:pPr>
-            <a:r>
-              <a:rPr lang="en-US" altLang="ko-KR" dirty="0"/>
-              <a:t>│   ├── </a:t>
-            </a:r>
-            <a:r>
-              <a:rPr lang="en-US" altLang="ko-KR" dirty="0" err="1"/>
-              <a:t>app.service.ts</a:t>
-            </a:r>
-            <a:endParaRPr lang="en-US" altLang="ko-KR" dirty="0"/>
-          </a:p>
-          <a:p>
-            <a:pPr marL="0" indent="0">
-              <a:buNone/>
-            </a:pPr>
-            <a:r>
-              <a:rPr lang="en-US" altLang="ko-KR" dirty="0"/>
-              <a:t>│   └── </a:t>
-            </a:r>
-            <a:r>
-              <a:rPr lang="en-US" altLang="ko-KR" dirty="0" err="1"/>
-              <a:t>main.ts</a:t>
-            </a:r>
-            <a:endParaRPr lang="en-US" altLang="ko-KR" dirty="0"/>
-          </a:p>
-          <a:p>
-            <a:pPr marL="0" indent="0">
-              <a:buNone/>
-            </a:pPr>
-            <a:r>
-              <a:rPr lang="en-US" altLang="ko-KR" dirty="0"/>
-              <a:t>├── test</a:t>
-            </a:r>
-          </a:p>
-          <a:p>
-            <a:pPr marL="0" indent="0">
-              <a:buNone/>
-            </a:pPr>
-            <a:r>
-              <a:rPr lang="en-US" altLang="ko-KR" dirty="0"/>
-              <a:t>│   ├── app.e2e-spec.ts</a:t>
-            </a:r>
-          </a:p>
-          <a:p>
-            <a:pPr marL="0" indent="0">
-              <a:buNone/>
-            </a:pPr>
-            <a:r>
-              <a:rPr lang="en-US" altLang="ko-KR" dirty="0"/>
-              <a:t>│   └── jest-e2e.json</a:t>
-            </a:r>
-          </a:p>
-          <a:p>
-            <a:pPr marL="0" indent="0">
-              <a:buNone/>
-            </a:pPr>
-            <a:r>
-              <a:rPr lang="en-US" altLang="ko-KR" dirty="0"/>
-              <a:t>├── </a:t>
-            </a:r>
-            <a:r>
-              <a:rPr lang="en-US" altLang="ko-KR" dirty="0" err="1"/>
-              <a:t>tsconfig.build.json</a:t>
-            </a:r>
-            <a:endParaRPr lang="en-US" altLang="ko-KR" dirty="0"/>
-          </a:p>
-          <a:p>
-            <a:pPr marL="0" indent="0">
-              <a:buNone/>
-            </a:pPr>
-            <a:r>
-              <a:rPr lang="en-US" altLang="ko-KR" dirty="0"/>
-              <a:t>└── </a:t>
-            </a:r>
-            <a:r>
-              <a:rPr lang="en-US" altLang="ko-KR" dirty="0" err="1"/>
-              <a:t>tsconfig.json</a:t>
-            </a:r>
-            <a:endParaRPr lang="en-US" altLang="ko-KR" dirty="0"/>
-          </a:p>
-        </p:txBody>
-      </p:sp>
-    </p:spTree>
-    <p:extLst>
-      <p:ext uri="{BB962C8B-B14F-4D97-AF65-F5344CB8AC3E}">
-        <p14:creationId xmlns:p14="http://schemas.microsoft.com/office/powerpoint/2010/main" val="754481125"/>
-      </p:ext>
-    </p:extLst>
-  </p:cSld>
-  <p:clrMapOvr>
-    <a:masterClrMapping/>
-  </p:clrMapOvr>
-</p:sld>
-</file>
-
-<file path=ppt/slides/slide13.xml><?xml version="1.0" encoding="utf-8"?>
-<p:sld xmlns:a="http://schemas.openxmlformats.org/drawingml/2006/main" xmlns:r="http://schemas.openxmlformats.org/officeDocument/2006/relationships" xmlns:p="http://schemas.openxmlformats.org/presentationml/2006/main">
-  <p:cSld>
-    <p:spTree>
-      <p:nvGrpSpPr>
-        <p:cNvPr id="1" name=""/>
-        <p:cNvGrpSpPr/>
-        <p:nvPr/>
-      </p:nvGrpSpPr>
-      <p:grpSpPr>
-        <a:xfrm>
-          <a:off x="0" y="0"/>
-          <a:ext cx="0" cy="0"/>
-          <a:chOff x="0" y="0"/>
-          <a:chExt cx="0" cy="0"/>
-        </a:xfrm>
-      </p:grpSpPr>
-      <p:sp>
-        <p:nvSpPr>
-          <p:cNvPr id="2" name="제목 1">
-            <a:extLst>
-              <a:ext uri="{FF2B5EF4-FFF2-40B4-BE49-F238E27FC236}">
-                <a16:creationId xmlns:a16="http://schemas.microsoft.com/office/drawing/2014/main" id="{1AAF3E13-B0A9-8540-EBA7-EDCB06A07F91}"/>
-              </a:ext>
-            </a:extLst>
-          </p:cNvPr>
-          <p:cNvSpPr>
-            <a:spLocks noGrp="1"/>
-          </p:cNvSpPr>
-          <p:nvPr>
-            <p:ph type="title"/>
-          </p:nvPr>
-        </p:nvSpPr>
-        <p:spPr/>
-        <p:txBody>
-          <a:bodyPr/>
-          <a:lstStyle/>
-          <a:p>
-            <a:endParaRPr lang="ko-KR" altLang="en-US"/>
-          </a:p>
-        </p:txBody>
-      </p:sp>
-      <p:sp>
-        <p:nvSpPr>
-          <p:cNvPr id="3" name="내용 개체 틀 2">
-            <a:extLst>
-              <a:ext uri="{FF2B5EF4-FFF2-40B4-BE49-F238E27FC236}">
-                <a16:creationId xmlns:a16="http://schemas.microsoft.com/office/drawing/2014/main" id="{70B79641-2C96-8954-D011-65625D68B012}"/>
-              </a:ext>
-            </a:extLst>
-          </p:cNvPr>
-          <p:cNvSpPr>
-            <a:spLocks noGrp="1"/>
-          </p:cNvSpPr>
-          <p:nvPr>
-            <p:ph idx="1"/>
-          </p:nvPr>
-        </p:nvSpPr>
-        <p:spPr/>
-        <p:txBody>
-          <a:bodyPr/>
-          <a:lstStyle/>
-          <a:p>
+            <a:pPr lvl="1"/>
             <a:r>
               <a:rPr lang="en-US" altLang="ko-KR" dirty="0"/>
               <a:t>$ </a:t>
